--- a/examples/training/vlan/vlan_training.pptx
+++ b/examples/training/vlan/vlan_training.pptx
@@ -16176,8 +16176,8 @@
         </p:nvSpPr>
         <p:spPr>
           <a:xfrm>
-            <a:off x="2090775" y="2853293"/>
-            <a:ext cx="8010143" cy="1764791"/>
+            <a:off x="1158087" y="2853293"/>
+            <a:ext cx="8942832" cy="1764791"/>
           </a:xfrm>
           <a:prstGeom prst="rect">
             <a:avLst/>
@@ -16200,14 +16200,14 @@
       </p:sp>
       <p:sp>
         <p:nvSpPr>
-          <p:cNvPr id="7" name="TextBox 6"/>
-          <p:cNvSpPr txBox="1"/>
-          <p:nvPr/>
-        </p:nvSpPr>
-        <p:spPr>
-          <a:xfrm>
-            <a:off x="2218791" y="2871581"/>
-            <a:ext cx="1024128" cy="201168"/>
+          <p:cNvPr id="7" name="sequence-phase-label:0"/>
+          <p:cNvSpPr txBox="1"/>
+          <p:nvPr/>
+        </p:nvSpPr>
+        <p:spPr>
+          <a:xfrm>
+            <a:off x="1267815" y="2889869"/>
+            <a:ext cx="1097280" cy="512064"/>
           </a:xfrm>
           <a:prstGeom prst="rect">
             <a:avLst/>
@@ -16217,11 +16217,11 @@
           </a:solidFill>
         </p:spPr>
         <p:txBody>
-          <a:bodyPr wrap="square" anchor="ctr" lIns="0" rIns="0" tIns="0" bIns="0">
-            <a:spAutoFit/>
-            <a:extLst>
-              <a:ext uri="{8AF73BB6-5E31-4F0F-A399-3D98F3B95FD9}">
-                <ns19:textLayout xmlns:ns19="urn:pptxdsl:text-layout:v1" role="natural"/>
+          <a:bodyPr wrap="none" anchor="t" lIns="0" rIns="0" tIns="0" bIns="0">
+            <a:spAutoFit/>
+            <a:extLst>
+              <a:ext uri="{8AF73BB6-5E31-4F0F-A399-3D98F3B95FD9}">
+                <ns19:textLayout xmlns:ns19="urn:pptxdsl:text-layout:v1" role="compact"/>
               </a:ext>
             </a:extLst>
           </a:bodyPr>
@@ -16229,11 +16229,11 @@
           <a:p>
             <a:pPr algn="l">
               <a:lnSpc>
-                <a:spcPct val="130000"/>
-              </a:lnSpc>
-            </a:pPr>
-            <a:r>
-              <a:rPr sz="850" b="1" lang="ja-JP">
+                <a:spcPct val="105000"/>
+              </a:lnSpc>
+            </a:pPr>
+            <a:r>
+              <a:rPr sz="1050" b="1" lang="ja-JP">
                 <a:solidFill>
                   <a:srgbClr val="0D7870"/>
                 </a:solidFill>
@@ -16241,7 +16241,25 @@
                 <a:ea typeface="Yu Gothic"/>
                 <a:cs typeface="Yu Gothic"/>
               </a:rPr>
-              <a:t>送信側ではVLAN 10</a:t>
+              <a:t>送信側では</a:t>
+            </a:r>
+          </a:p>
+          <a:p>
+            <a:pPr algn="l">
+              <a:lnSpc>
+                <a:spcPct val="105000"/>
+              </a:lnSpc>
+            </a:pPr>
+            <a:r>
+              <a:rPr sz="1050" b="1" lang="ja-JP">
+                <a:solidFill>
+                  <a:srgbClr val="0D7870"/>
+                </a:solidFill>
+                <a:latin typeface="Yu Gothic"/>
+                <a:ea typeface="Yu Gothic"/>
+                <a:cs typeface="Yu Gothic"/>
+              </a:rPr>
+              <a:t>VLAN 10</a:t>
             </a:r>
           </a:p>
         </p:txBody>
@@ -16254,8 +16272,8 @@
         </p:nvSpPr>
         <p:spPr>
           <a:xfrm>
-            <a:off x="2090775" y="4627229"/>
-            <a:ext cx="8010143" cy="1572768"/>
+            <a:off x="1158087" y="4627229"/>
+            <a:ext cx="8942832" cy="1572768"/>
           </a:xfrm>
           <a:prstGeom prst="rect">
             <a:avLst/>
@@ -16278,14 +16296,14 @@
       </p:sp>
       <p:sp>
         <p:nvSpPr>
-          <p:cNvPr id="9" name="TextBox 8"/>
-          <p:cNvSpPr txBox="1"/>
-          <p:nvPr/>
-        </p:nvSpPr>
-        <p:spPr>
-          <a:xfrm>
-            <a:off x="2218791" y="4645517"/>
-            <a:ext cx="1024128" cy="201168"/>
+          <p:cNvPr id="9" name="sequence-phase-label:1"/>
+          <p:cNvSpPr txBox="1"/>
+          <p:nvPr/>
+        </p:nvSpPr>
+        <p:spPr>
+          <a:xfrm>
+            <a:off x="1267815" y="4663805"/>
+            <a:ext cx="1097280" cy="512064"/>
           </a:xfrm>
           <a:prstGeom prst="rect">
             <a:avLst/>
@@ -16295,11 +16313,11 @@
           </a:solidFill>
         </p:spPr>
         <p:txBody>
-          <a:bodyPr wrap="square" anchor="ctr" lIns="0" rIns="0" tIns="0" bIns="0">
-            <a:spAutoFit/>
-            <a:extLst>
-              <a:ext uri="{8AF73BB6-5E31-4F0F-A399-3D98F3B95FD9}">
-                <ns24:textLayout xmlns:ns24="urn:pptxdsl:text-layout:v1" role="natural"/>
+          <a:bodyPr wrap="none" anchor="t" lIns="0" rIns="0" tIns="0" bIns="0">
+            <a:spAutoFit/>
+            <a:extLst>
+              <a:ext uri="{8AF73BB6-5E31-4F0F-A399-3D98F3B95FD9}">
+                <ns26:textLayout xmlns:ns26="urn:pptxdsl:text-layout:v1" role="compact"/>
               </a:ext>
             </a:extLst>
           </a:bodyPr>
@@ -16307,11 +16325,11 @@
           <a:p>
             <a:pPr algn="l">
               <a:lnSpc>
-                <a:spcPct val="130000"/>
-              </a:lnSpc>
-            </a:pPr>
-            <a:r>
-              <a:rPr sz="850" b="1" lang="ja-JP">
+                <a:spcPct val="105000"/>
+              </a:lnSpc>
+            </a:pPr>
+            <a:r>
+              <a:rPr sz="1050" b="1" lang="ja-JP">
                 <a:solidFill>
                   <a:srgbClr val="0D7870"/>
                 </a:solidFill>
@@ -16319,7 +16337,25 @@
                 <a:ea typeface="Yu Gothic"/>
                 <a:cs typeface="Yu Gothic"/>
               </a:rPr>
-              <a:t>受信側ではVLAN 20</a:t>
+              <a:t>受信側では</a:t>
+            </a:r>
+          </a:p>
+          <a:p>
+            <a:pPr algn="l">
+              <a:lnSpc>
+                <a:spcPct val="105000"/>
+              </a:lnSpc>
+            </a:pPr>
+            <a:r>
+              <a:rPr sz="1050" b="1" lang="ja-JP">
+                <a:solidFill>
+                  <a:srgbClr val="0D7870"/>
+                </a:solidFill>
+                <a:latin typeface="Yu Gothic"/>
+                <a:ea typeface="Yu Gothic"/>
+                <a:cs typeface="Yu Gothic"/>
+              </a:rPr>
+              <a:t>VLAN 20</a:t>
             </a:r>
           </a:p>
         </p:txBody>
@@ -16345,7 +16381,7 @@
             <a:spAutoFit/>
             <a:extLst>
               <a:ext uri="{8AF73BB6-5E31-4F0F-A399-3D98F3B95FD9}">
-                <ns29:textLayout xmlns:ns29="urn:pptxdsl:text-layout:v1" role="compact"/>
+                <ns33:textLayout xmlns:ns33="urn:pptxdsl:text-layout:v1" role="compact"/>
               </a:ext>
             </a:extLst>
           </a:bodyPr>
@@ -16463,7 +16499,7 @@
             <a:spAutoFit/>
             <a:extLst>
               <a:ext uri="{8AF73BB6-5E31-4F0F-A399-3D98F3B95FD9}">
-                <ns34:textLayout xmlns:ns34="urn:pptxdsl:text-layout:v1" role="compact"/>
+                <ns38:textLayout xmlns:ns38="urn:pptxdsl:text-layout:v1" role="compact"/>
               </a:ext>
             </a:extLst>
           </a:bodyPr>
@@ -16599,7 +16635,7 @@
             <a:spAutoFit/>
             <a:extLst>
               <a:ext uri="{8AF73BB6-5E31-4F0F-A399-3D98F3B95FD9}">
-                <ns41:textLayout xmlns:ns41="urn:pptxdsl:text-layout:v1" role="compact"/>
+                <ns45:textLayout xmlns:ns45="urn:pptxdsl:text-layout:v1" role="compact"/>
               </a:ext>
             </a:extLst>
           </a:bodyPr>
@@ -16735,7 +16771,7 @@
             <a:spAutoFit/>
             <a:extLst>
               <a:ext uri="{8AF73BB6-5E31-4F0F-A399-3D98F3B95FD9}">
-                <ns48:textLayout xmlns:ns48="urn:pptxdsl:text-layout:v1" role="compact"/>
+                <ns52:textLayout xmlns:ns52="urn:pptxdsl:text-layout:v1" role="compact"/>
               </a:ext>
             </a:extLst>
           </a:bodyPr>
@@ -16834,7 +16870,7 @@
       </p:cxnSp>
       <p:cxnSp>
         <p:nvCxnSpPr>
-          <p:cNvPr id="22" name="Connector 21"/>
+          <p:cNvPr id="22" name="sequence-message-line:access_in"/>
           <p:cNvCxnSpPr/>
           <p:nvPr/>
         </p:nvCxnSpPr>
@@ -16846,9 +16882,9 @@
           <a:prstGeom prst="line">
             <a:avLst/>
           </a:prstGeom>
-          <a:ln w="13335">
+          <a:ln w="15875">
             <a:solidFill>
-              <a:srgbClr val="666E70"/>
+              <a:srgbClr val="182C43"/>
             </a:solidFill>
             <a:tailEnd type="triangle" w="med" len="med"/>
           </a:ln>
@@ -16892,7 +16928,7 @@
             <a:spAutoFit/>
             <a:extLst>
               <a:ext uri="{8AF73BB6-5E31-4F0F-A399-3D98F3B95FD9}">
-                <ns54:textLayout xmlns:ns54="urn:pptxdsl:text-layout:v1" role="compact"/>
+                <ns58:textLayout xmlns:ns58="urn:pptxdsl:text-layout:v1" role="compact"/>
               </a:ext>
             </a:extLst>
           </a:bodyPr>
@@ -16937,7 +16973,7 @@
       </p:sp>
       <p:cxnSp>
         <p:nvCxnSpPr>
-          <p:cNvPr id="24" name="Connector 23"/>
+          <p:cNvPr id="24" name="sequence-message-line:untagged_native"/>
           <p:cNvCxnSpPr/>
           <p:nvPr/>
         </p:nvCxnSpPr>
@@ -16949,9 +16985,9 @@
           <a:prstGeom prst="line">
             <a:avLst/>
           </a:prstGeom>
-          <a:ln w="13335">
+          <a:ln w="15875">
             <a:solidFill>
-              <a:srgbClr val="666E70"/>
+              <a:srgbClr val="182C43"/>
             </a:solidFill>
             <a:tailEnd type="triangle" w="med" len="med"/>
           </a:ln>
@@ -16995,7 +17031,7 @@
             <a:spAutoFit/>
             <a:extLst>
               <a:ext uri="{8AF73BB6-5E31-4F0F-A399-3D98F3B95FD9}">
-                <ns62:textLayout xmlns:ns62="urn:pptxdsl:text-layout:v1" role="compact"/>
+                <ns66:textLayout xmlns:ns66="urn:pptxdsl:text-layout:v1" role="compact"/>
               </a:ext>
             </a:extLst>
           </a:bodyPr>
@@ -17054,7 +17090,7 @@
           </a:prstGeom>
           <a:ln w="15875">
             <a:solidFill>
-              <a:srgbClr val="6C7372"/>
+              <a:srgbClr val="182C43"/>
             </a:solidFill>
           </a:ln>
           <a:effectLst/>
@@ -17090,7 +17126,7 @@
           </a:prstGeom>
           <a:ln w="15875">
             <a:solidFill>
-              <a:srgbClr val="6C7372"/>
+              <a:srgbClr val="182C43"/>
             </a:solidFill>
           </a:ln>
           <a:effectLst/>
@@ -17124,9 +17160,9 @@
           <a:prstGeom prst="line">
             <a:avLst/>
           </a:prstGeom>
-          <a:ln w="13335">
+          <a:ln w="15875">
             <a:solidFill>
-              <a:srgbClr val="666E70"/>
+              <a:srgbClr val="182C43"/>
             </a:solidFill>
             <a:tailEnd type="triangle" w="med" len="med"/>
           </a:ln>
@@ -17170,7 +17206,7 @@
             <a:spAutoFit/>
             <a:extLst>
               <a:ext uri="{8AF73BB6-5E31-4F0F-A399-3D98F3B95FD9}">
-                <ns70:textLayout xmlns:ns70="urn:pptxdsl:text-layout:v1" role="compact"/>
+                <ns74:textLayout xmlns:ns74="urn:pptxdsl:text-layout:v1" role="compact"/>
               </a:ext>
             </a:extLst>
           </a:bodyPr>
@@ -17215,7 +17251,7 @@
       </p:sp>
       <p:cxnSp>
         <p:nvCxnSpPr>
-          <p:cNvPr id="30" name="Connector 29"/>
+          <p:cNvPr id="30" name="sequence-message-line:wrong_forward"/>
           <p:cNvCxnSpPr/>
           <p:nvPr/>
         </p:nvCxnSpPr>
@@ -17227,9 +17263,9 @@
           <a:prstGeom prst="line">
             <a:avLst/>
           </a:prstGeom>
-          <a:ln w="13335">
+          <a:ln w="15875">
             <a:solidFill>
-              <a:srgbClr val="666E70"/>
+              <a:srgbClr val="182C43"/>
             </a:solidFill>
             <a:tailEnd type="triangle" w="med" len="med"/>
           </a:ln>
@@ -17273,7 +17309,7 @@
             <a:spAutoFit/>
             <a:extLst>
               <a:ext uri="{8AF73BB6-5E31-4F0F-A399-3D98F3B95FD9}">
-                <ns78:textLayout xmlns:ns78="urn:pptxdsl:text-layout:v1" role="compact"/>
+                <ns82:textLayout xmlns:ns82="urn:pptxdsl:text-layout:v1" role="compact"/>
               </a:ext>
             </a:extLst>
           </a:bodyPr>
@@ -17381,7 +17417,7 @@
             <a:spAutoFit/>
             <a:extLst>
               <a:ext uri="{8AF73BB6-5E31-4F0F-A399-3D98F3B95FD9}">
-                <ns85:textLayout xmlns:ns85="urn:pptxdsl:text-layout:v1" role="body"/>
+                <ns89:textLayout xmlns:ns89="urn:pptxdsl:text-layout:v1" role="body"/>
               </a:ext>
             </a:extLst>
           </a:bodyPr>
@@ -17427,7 +17463,7 @@
             <a:spAutoFit/>
             <a:extLst>
               <a:ext uri="{8AF73BB6-5E31-4F0F-A399-3D98F3B95FD9}">
-                <ns90:textLayout xmlns:ns90="urn:pptxdsl:text-layout:v1" role="body"/>
+                <ns94:textLayout xmlns:ns94="urn:pptxdsl:text-layout:v1" role="body"/>
               </a:ext>
             </a:extLst>
           </a:bodyPr>
@@ -18687,8 +18723,8 @@
         </p:nvSpPr>
         <p:spPr>
           <a:xfrm>
-            <a:off x="2090775" y="2821838"/>
-            <a:ext cx="8010143" cy="978408"/>
+            <a:off x="1158087" y="2821838"/>
+            <a:ext cx="8942832" cy="978408"/>
           </a:xfrm>
           <a:prstGeom prst="rect">
             <a:avLst/>
@@ -18711,14 +18747,14 @@
       </p:sp>
       <p:sp>
         <p:nvSpPr>
-          <p:cNvPr id="7" name="TextBox 6"/>
-          <p:cNvSpPr txBox="1"/>
-          <p:nvPr/>
-        </p:nvSpPr>
-        <p:spPr>
-          <a:xfrm>
-            <a:off x="2218791" y="2840126"/>
-            <a:ext cx="1024128" cy="201168"/>
+          <p:cNvPr id="7" name="sequence-phase-label:0"/>
+          <p:cNvSpPr txBox="1"/>
+          <p:nvPr/>
+        </p:nvSpPr>
+        <p:spPr>
+          <a:xfrm>
+            <a:off x="1267815" y="2858414"/>
+            <a:ext cx="1097280" cy="512064"/>
           </a:xfrm>
           <a:prstGeom prst="rect">
             <a:avLst/>
@@ -18728,11 +18764,11 @@
           </a:solidFill>
         </p:spPr>
         <p:txBody>
-          <a:bodyPr wrap="square" anchor="ctr" lIns="0" rIns="0" tIns="0" bIns="0">
-            <a:spAutoFit/>
-            <a:extLst>
-              <a:ext uri="{8AF73BB6-5E31-4F0F-A399-3D98F3B95FD9}">
-                <ns17:textLayout xmlns:ns17="urn:pptxdsl:text-layout:v1" role="natural"/>
+          <a:bodyPr wrap="none" anchor="t" lIns="0" rIns="0" tIns="0" bIns="0">
+            <a:spAutoFit/>
+            <a:extLst>
+              <a:ext uri="{8AF73BB6-5E31-4F0F-A399-3D98F3B95FD9}">
+                <ns17:textLayout xmlns:ns17="urn:pptxdsl:text-layout:v1" role="compact"/>
               </a:ext>
             </a:extLst>
           </a:bodyPr>
@@ -18740,11 +18776,11 @@
           <a:p>
             <a:pPr algn="l">
               <a:lnSpc>
-                <a:spcPct val="130000"/>
-              </a:lnSpc>
-            </a:pPr>
-            <a:r>
-              <a:rPr sz="850" b="1" lang="ja-JP">
+                <a:spcPct val="105000"/>
+              </a:lnSpc>
+            </a:pPr>
+            <a:r>
+              <a:rPr sz="1050" b="1" lang="ja-JP">
                 <a:solidFill>
                   <a:srgbClr val="0D7870"/>
                 </a:solidFill>
@@ -18765,8 +18801,8 @@
         </p:nvSpPr>
         <p:spPr>
           <a:xfrm>
-            <a:off x="2090775" y="3809390"/>
-            <a:ext cx="8010143" cy="484631"/>
+            <a:off x="1158087" y="3809390"/>
+            <a:ext cx="8942832" cy="484631"/>
           </a:xfrm>
           <a:prstGeom prst="rect">
             <a:avLst/>
@@ -18789,14 +18825,14 @@
       </p:sp>
       <p:sp>
         <p:nvSpPr>
-          <p:cNvPr id="9" name="TextBox 8"/>
-          <p:cNvSpPr txBox="1"/>
-          <p:nvPr/>
-        </p:nvSpPr>
-        <p:spPr>
-          <a:xfrm>
-            <a:off x="2218791" y="3827678"/>
-            <a:ext cx="1024128" cy="201168"/>
+          <p:cNvPr id="9" name="sequence-phase-label:1"/>
+          <p:cNvSpPr txBox="1"/>
+          <p:nvPr/>
+        </p:nvSpPr>
+        <p:spPr>
+          <a:xfrm>
+            <a:off x="1267815" y="3845966"/>
+            <a:ext cx="1097280" cy="411479"/>
           </a:xfrm>
           <a:prstGeom prst="rect">
             <a:avLst/>
@@ -18806,11 +18842,11 @@
           </a:solidFill>
         </p:spPr>
         <p:txBody>
-          <a:bodyPr wrap="square" anchor="ctr" lIns="0" rIns="0" tIns="0" bIns="0">
-            <a:spAutoFit/>
-            <a:extLst>
-              <a:ext uri="{8AF73BB6-5E31-4F0F-A399-3D98F3B95FD9}">
-                <ns22:textLayout xmlns:ns22="urn:pptxdsl:text-layout:v1" role="natural"/>
+          <a:bodyPr wrap="none" anchor="t" lIns="0" rIns="0" tIns="0" bIns="0">
+            <a:spAutoFit/>
+            <a:extLst>
+              <a:ext uri="{8AF73BB6-5E31-4F0F-A399-3D98F3B95FD9}">
+                <ns22:textLayout xmlns:ns22="urn:pptxdsl:text-layout:v1" role="compact"/>
               </a:ext>
             </a:extLst>
           </a:bodyPr>
@@ -18818,11 +18854,11 @@
           <a:p>
             <a:pPr algn="l">
               <a:lnSpc>
-                <a:spcPct val="130000"/>
-              </a:lnSpc>
-            </a:pPr>
-            <a:r>
-              <a:rPr sz="850" b="1" lang="ja-JP">
+                <a:spcPct val="105000"/>
+              </a:lnSpc>
+            </a:pPr>
+            <a:r>
+              <a:rPr sz="1050" b="1" lang="ja-JP">
                 <a:solidFill>
                   <a:srgbClr val="0D7870"/>
                 </a:solidFill>
@@ -18843,8 +18879,8 @@
         </p:nvSpPr>
         <p:spPr>
           <a:xfrm>
-            <a:off x="2090775" y="4303166"/>
-            <a:ext cx="8010143" cy="1014984"/>
+            <a:off x="1158087" y="4303166"/>
+            <a:ext cx="8942832" cy="1014984"/>
           </a:xfrm>
           <a:prstGeom prst="rect">
             <a:avLst/>
@@ -18867,14 +18903,14 @@
       </p:sp>
       <p:sp>
         <p:nvSpPr>
-          <p:cNvPr id="11" name="TextBox 10"/>
-          <p:cNvSpPr txBox="1"/>
-          <p:nvPr/>
-        </p:nvSpPr>
-        <p:spPr>
-          <a:xfrm>
-            <a:off x="2218791" y="4321454"/>
-            <a:ext cx="1024128" cy="201168"/>
+          <p:cNvPr id="11" name="sequence-phase-label:2"/>
+          <p:cNvSpPr txBox="1"/>
+          <p:nvPr/>
+        </p:nvSpPr>
+        <p:spPr>
+          <a:xfrm>
+            <a:off x="1267815" y="4339742"/>
+            <a:ext cx="1097280" cy="512064"/>
           </a:xfrm>
           <a:prstGeom prst="rect">
             <a:avLst/>
@@ -18884,11 +18920,11 @@
           </a:solidFill>
         </p:spPr>
         <p:txBody>
-          <a:bodyPr wrap="square" anchor="ctr" lIns="0" rIns="0" tIns="0" bIns="0">
-            <a:spAutoFit/>
-            <a:extLst>
-              <a:ext uri="{8AF73BB6-5E31-4F0F-A399-3D98F3B95FD9}">
-                <ns27:textLayout xmlns:ns27="urn:pptxdsl:text-layout:v1" role="natural"/>
+          <a:bodyPr wrap="none" anchor="t" lIns="0" rIns="0" tIns="0" bIns="0">
+            <a:spAutoFit/>
+            <a:extLst>
+              <a:ext uri="{8AF73BB6-5E31-4F0F-A399-3D98F3B95FD9}">
+                <ns27:textLayout xmlns:ns27="urn:pptxdsl:text-layout:v1" role="compact"/>
               </a:ext>
             </a:extLst>
           </a:bodyPr>
@@ -18896,11 +18932,11 @@
           <a:p>
             <a:pPr algn="l">
               <a:lnSpc>
-                <a:spcPct val="130000"/>
-              </a:lnSpc>
-            </a:pPr>
-            <a:r>
-              <a:rPr sz="850" b="1" lang="ja-JP">
+                <a:spcPct val="105000"/>
+              </a:lnSpc>
+            </a:pPr>
+            <a:r>
+              <a:rPr sz="1050" b="1" lang="ja-JP">
                 <a:solidFill>
                   <a:srgbClr val="0D7870"/>
                 </a:solidFill>
@@ -19387,7 +19423,7 @@
       </p:cxnSp>
       <p:cxnSp>
         <p:nvCxnSpPr>
-          <p:cNvPr id="24" name="Connector 23"/>
+          <p:cNvPr id="24" name="sequence-message-line:untagged_in"/>
           <p:cNvCxnSpPr/>
           <p:nvPr/>
         </p:nvCxnSpPr>
@@ -19399,9 +19435,9 @@
           <a:prstGeom prst="line">
             <a:avLst/>
           </a:prstGeom>
-          <a:ln w="13335">
+          <a:ln w="15875">
             <a:solidFill>
-              <a:srgbClr val="666E70"/>
+              <a:srgbClr val="182C43"/>
             </a:solidFill>
             <a:tailEnd type="triangle" w="med" len="med"/>
           </a:ln>
@@ -19486,7 +19522,7 @@
           </a:prstGeom>
           <a:ln w="15875">
             <a:solidFill>
-              <a:srgbClr val="6C7372"/>
+              <a:srgbClr val="182C43"/>
             </a:solidFill>
           </a:ln>
           <a:effectLst/>
@@ -19522,7 +19558,7 @@
           </a:prstGeom>
           <a:ln w="15875">
             <a:solidFill>
-              <a:srgbClr val="6C7372"/>
+              <a:srgbClr val="182C43"/>
             </a:solidFill>
           </a:ln>
           <a:effectLst/>
@@ -19556,9 +19592,9 @@
           <a:prstGeom prst="line">
             <a:avLst/>
           </a:prstGeom>
-          <a:ln w="13335">
+          <a:ln w="15875">
             <a:solidFill>
-              <a:srgbClr val="666E70"/>
+              <a:srgbClr val="182C43"/>
             </a:solidFill>
             <a:tailEnd type="triangle" w="med" len="med"/>
           </a:ln>
@@ -19647,7 +19683,7 @@
       </p:sp>
       <p:cxnSp>
         <p:nvCxnSpPr>
-          <p:cNvPr id="30" name="Connector 29"/>
+          <p:cNvPr id="30" name="sequence-message-line:tagged"/>
           <p:cNvCxnSpPr/>
           <p:nvPr/>
         </p:nvCxnSpPr>
@@ -19659,9 +19695,9 @@
           <a:prstGeom prst="line">
             <a:avLst/>
           </a:prstGeom>
-          <a:ln w="13335">
+          <a:ln w="15875">
             <a:solidFill>
-              <a:srgbClr val="666E70"/>
+              <a:srgbClr val="182C43"/>
             </a:solidFill>
             <a:tailEnd type="triangle" w="med" len="med"/>
           </a:ln>
@@ -19764,7 +19800,7 @@
           </a:prstGeom>
           <a:ln w="15875">
             <a:solidFill>
-              <a:srgbClr val="6C7372"/>
+              <a:srgbClr val="182C43"/>
             </a:solidFill>
           </a:ln>
           <a:effectLst/>
@@ -19800,7 +19836,7 @@
           </a:prstGeom>
           <a:ln w="15875">
             <a:solidFill>
-              <a:srgbClr val="6C7372"/>
+              <a:srgbClr val="182C43"/>
             </a:solidFill>
           </a:ln>
           <a:effectLst/>
@@ -19834,9 +19870,9 @@
           <a:prstGeom prst="line">
             <a:avLst/>
           </a:prstGeom>
-          <a:ln w="13335">
+          <a:ln w="15875">
             <a:solidFill>
-              <a:srgbClr val="666E70"/>
+              <a:srgbClr val="182C43"/>
             </a:solidFill>
             <a:tailEnd type="triangle" w="med" len="med"/>
           </a:ln>
@@ -19925,7 +19961,7 @@
       </p:sp>
       <p:cxnSp>
         <p:nvCxnSpPr>
-          <p:cNvPr id="36" name="Connector 35"/>
+          <p:cNvPr id="36" name="sequence-message-line:untagged_out"/>
           <p:cNvCxnSpPr/>
           <p:nvPr/>
         </p:nvCxnSpPr>
@@ -19937,9 +19973,9 @@
           <a:prstGeom prst="line">
             <a:avLst/>
           </a:prstGeom>
-          <a:ln w="13335">
+          <a:ln w="15875">
             <a:solidFill>
-              <a:srgbClr val="666E70"/>
+              <a:srgbClr val="182C43"/>
             </a:solidFill>
             <a:tailEnd type="triangle" w="med" len="med"/>
           </a:ln>
@@ -27726,8 +27762,8 @@
         </p:nvSpPr>
         <p:spPr>
           <a:xfrm>
-            <a:off x="1587855" y="2683581"/>
-            <a:ext cx="9015984" cy="978408"/>
+            <a:off x="655167" y="2683581"/>
+            <a:ext cx="9948672" cy="978408"/>
           </a:xfrm>
           <a:prstGeom prst="rect">
             <a:avLst/>
@@ -27750,14 +27786,14 @@
       </p:sp>
       <p:sp>
         <p:nvSpPr>
-          <p:cNvPr id="7" name="TextBox 6"/>
-          <p:cNvSpPr txBox="1"/>
-          <p:nvPr/>
-        </p:nvSpPr>
-        <p:spPr>
-          <a:xfrm>
-            <a:off x="1715871" y="2701869"/>
-            <a:ext cx="1024128" cy="201168"/>
+          <p:cNvPr id="7" name="sequence-phase-label:0"/>
+          <p:cNvSpPr txBox="1"/>
+          <p:nvPr/>
+        </p:nvSpPr>
+        <p:spPr>
+          <a:xfrm>
+            <a:off x="764895" y="2720157"/>
+            <a:ext cx="1097280" cy="512064"/>
           </a:xfrm>
           <a:prstGeom prst="rect">
             <a:avLst/>
@@ -27767,11 +27803,11 @@
           </a:solidFill>
         </p:spPr>
         <p:txBody>
-          <a:bodyPr wrap="square" anchor="ctr" lIns="0" rIns="0" tIns="0" bIns="0">
-            <a:spAutoFit/>
-            <a:extLst>
-              <a:ext uri="{8AF73BB6-5E31-4F0F-A399-3D98F3B95FD9}">
-                <ns17:textLayout xmlns:ns17="urn:pptxdsl:text-layout:v1" role="natural"/>
+          <a:bodyPr wrap="none" anchor="t" lIns="0" rIns="0" tIns="0" bIns="0">
+            <a:spAutoFit/>
+            <a:extLst>
+              <a:ext uri="{8AF73BB6-5E31-4F0F-A399-3D98F3B95FD9}">
+                <ns17:textLayout xmlns:ns17="urn:pptxdsl:text-layout:v1" role="compact"/>
               </a:ext>
             </a:extLst>
           </a:bodyPr>
@@ -27779,11 +27815,11 @@
           <a:p>
             <a:pPr algn="l">
               <a:lnSpc>
-                <a:spcPct val="130000"/>
-              </a:lnSpc>
-            </a:pPr>
-            <a:r>
-              <a:rPr sz="850" b="1" lang="ja-JP">
+                <a:spcPct val="105000"/>
+              </a:lnSpc>
+            </a:pPr>
+            <a:r>
+              <a:rPr sz="1050" b="1" lang="ja-JP">
                 <a:solidFill>
                   <a:srgbClr val="0D7870"/>
                 </a:solidFill>
@@ -27804,8 +27840,8 @@
         </p:nvSpPr>
         <p:spPr>
           <a:xfrm>
-            <a:off x="1587855" y="3671133"/>
-            <a:ext cx="9015984" cy="978408"/>
+            <a:off x="655167" y="3671133"/>
+            <a:ext cx="9948672" cy="978408"/>
           </a:xfrm>
           <a:prstGeom prst="rect">
             <a:avLst/>
@@ -27828,14 +27864,14 @@
       </p:sp>
       <p:sp>
         <p:nvSpPr>
-          <p:cNvPr id="9" name="TextBox 8"/>
-          <p:cNvSpPr txBox="1"/>
-          <p:nvPr/>
-        </p:nvSpPr>
-        <p:spPr>
-          <a:xfrm>
-            <a:off x="1715871" y="3689421"/>
-            <a:ext cx="1024128" cy="201168"/>
+          <p:cNvPr id="9" name="sequence-phase-label:1"/>
+          <p:cNvSpPr txBox="1"/>
+          <p:nvPr/>
+        </p:nvSpPr>
+        <p:spPr>
+          <a:xfrm>
+            <a:off x="764895" y="3707709"/>
+            <a:ext cx="1097280" cy="512064"/>
           </a:xfrm>
           <a:prstGeom prst="rect">
             <a:avLst/>
@@ -27845,11 +27881,11 @@
           </a:solidFill>
         </p:spPr>
         <p:txBody>
-          <a:bodyPr wrap="square" anchor="ctr" lIns="0" rIns="0" tIns="0" bIns="0">
-            <a:spAutoFit/>
-            <a:extLst>
-              <a:ext uri="{8AF73BB6-5E31-4F0F-A399-3D98F3B95FD9}">
-                <ns22:textLayout xmlns:ns22="urn:pptxdsl:text-layout:v1" role="natural"/>
+          <a:bodyPr wrap="none" anchor="t" lIns="0" rIns="0" tIns="0" bIns="0">
+            <a:spAutoFit/>
+            <a:extLst>
+              <a:ext uri="{8AF73BB6-5E31-4F0F-A399-3D98F3B95FD9}">
+                <ns22:textLayout xmlns:ns22="urn:pptxdsl:text-layout:v1" role="compact"/>
               </a:ext>
             </a:extLst>
           </a:bodyPr>
@@ -27857,11 +27893,11 @@
           <a:p>
             <a:pPr algn="l">
               <a:lnSpc>
-                <a:spcPct val="130000"/>
-              </a:lnSpc>
-            </a:pPr>
-            <a:r>
-              <a:rPr sz="850" b="1" lang="ja-JP">
+                <a:spcPct val="105000"/>
+              </a:lnSpc>
+            </a:pPr>
+            <a:r>
+              <a:rPr sz="1050" b="1" lang="ja-JP">
                 <a:solidFill>
                   <a:srgbClr val="0D7870"/>
                 </a:solidFill>
@@ -27882,8 +27918,8 @@
         </p:nvSpPr>
         <p:spPr>
           <a:xfrm>
-            <a:off x="1587855" y="4658685"/>
-            <a:ext cx="9015984" cy="1014984"/>
+            <a:off x="655167" y="4658685"/>
+            <a:ext cx="9948672" cy="1014984"/>
           </a:xfrm>
           <a:prstGeom prst="rect">
             <a:avLst/>
@@ -27906,14 +27942,14 @@
       </p:sp>
       <p:sp>
         <p:nvSpPr>
-          <p:cNvPr id="11" name="TextBox 10"/>
-          <p:cNvSpPr txBox="1"/>
-          <p:nvPr/>
-        </p:nvSpPr>
-        <p:spPr>
-          <a:xfrm>
-            <a:off x="1715871" y="4676973"/>
-            <a:ext cx="1024128" cy="201168"/>
+          <p:cNvPr id="11" name="sequence-phase-label:2"/>
+          <p:cNvSpPr txBox="1"/>
+          <p:nvPr/>
+        </p:nvSpPr>
+        <p:spPr>
+          <a:xfrm>
+            <a:off x="764895" y="4695261"/>
+            <a:ext cx="1097280" cy="512064"/>
           </a:xfrm>
           <a:prstGeom prst="rect">
             <a:avLst/>
@@ -27923,11 +27959,11 @@
           </a:solidFill>
         </p:spPr>
         <p:txBody>
-          <a:bodyPr wrap="square" anchor="ctr" lIns="0" rIns="0" tIns="0" bIns="0">
-            <a:spAutoFit/>
-            <a:extLst>
-              <a:ext uri="{8AF73BB6-5E31-4F0F-A399-3D98F3B95FD9}">
-                <ns27:textLayout xmlns:ns27="urn:pptxdsl:text-layout:v1" role="natural"/>
+          <a:bodyPr wrap="none" anchor="t" lIns="0" rIns="0" tIns="0" bIns="0">
+            <a:spAutoFit/>
+            <a:extLst>
+              <a:ext uri="{8AF73BB6-5E31-4F0F-A399-3D98F3B95FD9}">
+                <ns27:textLayout xmlns:ns27="urn:pptxdsl:text-layout:v1" role="compact"/>
               </a:ext>
             </a:extLst>
           </a:bodyPr>
@@ -27935,11 +27971,11 @@
           <a:p>
             <a:pPr algn="l">
               <a:lnSpc>
-                <a:spcPct val="130000"/>
-              </a:lnSpc>
-            </a:pPr>
-            <a:r>
-              <a:rPr sz="850" b="1" lang="ja-JP">
+                <a:spcPct val="105000"/>
+              </a:lnSpc>
+            </a:pPr>
+            <a:r>
+              <a:rPr sz="1050" b="1" lang="ja-JP">
                 <a:solidFill>
                   <a:srgbClr val="0D7870"/>
                 </a:solidFill>
@@ -28680,7 +28716,7 @@
       </p:cxnSp>
       <p:cxnSp>
         <p:nvCxnSpPr>
-          <p:cNvPr id="30" name="Connector 29"/>
+          <p:cNvPr id="30" name="sequence-message-line:m1"/>
           <p:cNvCxnSpPr/>
           <p:nvPr/>
         </p:nvCxnSpPr>
@@ -28692,9 +28728,9 @@
           <a:prstGeom prst="line">
             <a:avLst/>
           </a:prstGeom>
-          <a:ln w="13335">
+          <a:ln w="15875">
             <a:solidFill>
-              <a:srgbClr val="666E70"/>
+              <a:srgbClr val="182C43"/>
             </a:solidFill>
             <a:tailEnd type="triangle" w="med" len="med"/>
           </a:ln>
@@ -28783,7 +28819,7 @@
       </p:sp>
       <p:cxnSp>
         <p:nvCxnSpPr>
-          <p:cNvPr id="32" name="Connector 31"/>
+          <p:cNvPr id="32" name="sequence-message-line:m2"/>
           <p:cNvCxnSpPr/>
           <p:nvPr/>
         </p:nvCxnSpPr>
@@ -28795,9 +28831,9 @@
           <a:prstGeom prst="line">
             <a:avLst/>
           </a:prstGeom>
-          <a:ln w="13335">
+          <a:ln w="15875">
             <a:solidFill>
-              <a:srgbClr val="666E70"/>
+              <a:srgbClr val="182C43"/>
             </a:solidFill>
             <a:tailEnd type="triangle" w="med" len="med"/>
           </a:ln>
@@ -28868,7 +28904,7 @@
       </p:sp>
       <p:cxnSp>
         <p:nvCxnSpPr>
-          <p:cNvPr id="34" name="Connector 33"/>
+          <p:cNvPr id="34" name="sequence-message-line:m3"/>
           <p:cNvCxnSpPr/>
           <p:nvPr/>
         </p:nvCxnSpPr>
@@ -28880,9 +28916,9 @@
           <a:prstGeom prst="line">
             <a:avLst/>
           </a:prstGeom>
-          <a:ln w="13335">
+          <a:ln w="15875">
             <a:solidFill>
-              <a:srgbClr val="666E70"/>
+              <a:srgbClr val="182C43"/>
             </a:solidFill>
             <a:tailEnd type="triangle" w="med" len="med"/>
           </a:ln>
@@ -28971,7 +29007,7 @@
       </p:sp>
       <p:cxnSp>
         <p:nvCxnSpPr>
-          <p:cNvPr id="36" name="Connector 35"/>
+          <p:cNvPr id="36" name="sequence-message-line:m4"/>
           <p:cNvCxnSpPr/>
           <p:nvPr/>
         </p:nvCxnSpPr>
@@ -28983,9 +29019,9 @@
           <a:prstGeom prst="line">
             <a:avLst/>
           </a:prstGeom>
-          <a:ln w="13335">
+          <a:ln w="15875">
             <a:solidFill>
-              <a:srgbClr val="666E70"/>
+              <a:srgbClr val="182C43"/>
             </a:solidFill>
             <a:tailEnd type="triangle" w="med" len="med"/>
           </a:ln>
@@ -29056,7 +29092,7 @@
       </p:sp>
       <p:cxnSp>
         <p:nvCxnSpPr>
-          <p:cNvPr id="38" name="Connector 37"/>
+          <p:cNvPr id="38" name="sequence-message-line:m5"/>
           <p:cNvCxnSpPr/>
           <p:nvPr/>
         </p:nvCxnSpPr>
@@ -29068,9 +29104,9 @@
           <a:prstGeom prst="line">
             <a:avLst/>
           </a:prstGeom>
-          <a:ln w="13335">
+          <a:ln w="15875">
             <a:solidFill>
-              <a:srgbClr val="666E70"/>
+              <a:srgbClr val="182C43"/>
             </a:solidFill>
             <a:tailEnd type="triangle" w="med" len="med"/>
           </a:ln>
@@ -29159,7 +29195,7 @@
       </p:sp>
       <p:cxnSp>
         <p:nvCxnSpPr>
-          <p:cNvPr id="40" name="Connector 39"/>
+          <p:cNvPr id="40" name="sequence-message-line:m6"/>
           <p:cNvCxnSpPr/>
           <p:nvPr/>
         </p:nvCxnSpPr>
@@ -29171,9 +29207,9 @@
           <a:prstGeom prst="line">
             <a:avLst/>
           </a:prstGeom>
-          <a:ln w="13335">
+          <a:ln w="15875">
             <a:solidFill>
-              <a:srgbClr val="666E70"/>
+              <a:srgbClr val="182C43"/>
             </a:solidFill>
             <a:tailEnd type="triangle" w="med" len="med"/>
           </a:ln>
